--- a/examples/hello-table/fixtures/deck.libreoffice-resaved.pptx
+++ b/examples/hello-table/fixtures/deck.libreoffice-resaved.pptx
@@ -8697,7 +8697,7 @@
       </p:grpSpPr>
       <p:sp>
         <p:nvSpPr>
-          <p:cNvPr id="73" name="ox:ed7bca33-ef98-5495-a223-3046476144b1"/>
+          <p:cNvPr id="73" name="mleaf:ed7bca33-ef98-5495-a223-3046476144b1"/>
           <p:cNvSpPr/>
           <p:nvPr/>
         </p:nvSpPr>
@@ -8740,7 +8740,7 @@
       </p:sp>
       <p:sp>
         <p:nvSpPr>
-          <p:cNvPr id="74" name="ox:79cf7543-79e8-551e-992b-1899612ea818"/>
+          <p:cNvPr id="74" name="mleaf:79cf7543-79e8-551e-992b-1899612ea818"/>
           <p:cNvSpPr/>
           <p:nvPr/>
         </p:nvSpPr>
@@ -8793,7 +8793,7 @@
       </p:sp>
       <p:sp>
         <p:nvSpPr>
-          <p:cNvPr id="75" name="ox:b73a0317-a900-5035-8af5-41d456a76424"/>
+          <p:cNvPr id="75" name="mleaf:b73a0317-a900-5035-8af5-41d456a76424"/>
           <p:cNvSpPr/>
           <p:nvPr/>
         </p:nvSpPr>
@@ -8883,7 +8883,7 @@
       </p:grpSpPr>
       <p:sp>
         <p:nvSpPr>
-          <p:cNvPr id="76" name="ox:9b9cc37c-57d8-5294-896e-305ec1757883"/>
+          <p:cNvPr id="76" name="mleaf:9b9cc37c-57d8-5294-896e-305ec1757883"/>
           <p:cNvSpPr/>
           <p:nvPr/>
         </p:nvSpPr>
@@ -8936,7 +8936,7 @@
       </p:sp>
       <p:graphicFrame>
         <p:nvGraphicFramePr>
-          <p:cNvPr id="77" name="ox:987b7602-b694-53d2-b390-57f9d8ca3870"/>
+          <p:cNvPr id="77" name="mleaf:987b7602-b694-53d2-b390-57f9d8ca3870"/>
           <p:cNvGraphicFramePr/>
           <p:nvPr/>
         </p:nvGraphicFramePr>
@@ -9430,7 +9430,7 @@
       </p:graphicFrame>
       <p:graphicFrame>
         <p:nvGraphicFramePr>
-          <p:cNvPr id="78" name="ox:23ddaa1c-1c51-5324-8860-64ed833aa77f"/>
+          <p:cNvPr id="78" name="mleaf:23ddaa1c-1c51-5324-8860-64ed833aa77f"/>
           <p:cNvGraphicFramePr/>
           <p:nvPr/>
         </p:nvGraphicFramePr>
@@ -9446,7 +9446,7 @@
       </p:graphicFrame>
       <p:sp>
         <p:nvSpPr>
-          <p:cNvPr id="79" name="ox:1f3d316c-9724-5069-b314-93f167a63dbb"/>
+          <p:cNvPr id="79" name="mleaf:1f3d316c-9724-5069-b314-93f167a63dbb"/>
           <p:cNvSpPr/>
           <p:nvPr/>
         </p:nvSpPr>
@@ -9554,7 +9554,7 @@
       </p:grpSpPr>
       <p:sp>
         <p:nvSpPr>
-          <p:cNvPr id="80" name="ox:5b80e2c4-11e9-59eb-ba28-26372e59d240"/>
+          <p:cNvPr id="80" name="mleaf:5b80e2c4-11e9-59eb-ba28-26372e59d240"/>
           <p:cNvSpPr/>
           <p:nvPr/>
         </p:nvSpPr>
@@ -9607,7 +9607,7 @@
       </p:sp>
       <p:sp>
         <p:nvSpPr>
-          <p:cNvPr id="81" name="ox:fe7234e8-6154-5a93-9672-691664c55a4c"/>
+          <p:cNvPr id="81" name="mleaf:fe7234e8-6154-5a93-9672-691664c55a4c"/>
           <p:cNvSpPr/>
           <p:nvPr/>
         </p:nvSpPr>
@@ -9755,7 +9755,7 @@
       </p:sp>
       <p:pic>
         <p:nvPicPr>
-          <p:cNvPr id="82" name="ox:3dd13f43-6346-534e-a04d-fb73fa6e8967" descr=""/>
+          <p:cNvPr id="82" name="mleaf:3dd13f43-6346-534e-a04d-fb73fa6e8967" descr=""/>
           <p:cNvPicPr/>
           <p:nvPr/>
         </p:nvPicPr>

--- a/examples/hello-table/fixtures/deck.libreoffice-resaved.pptx
+++ b/examples/hello-table/fixtures/deck.libreoffice-resaved.pptx
@@ -161,11 +161,11 @@
         </c:ser>
         <c:gapWidth val="219"/>
         <c:overlap val="-27"/>
-        <c:axId val="83635416"/>
-        <c:axId val="7607736"/>
+        <c:axId val="1916532"/>
+        <c:axId val="8750026"/>
       </c:barChart>
       <c:catAx>
-        <c:axId val="83635416"/>
+        <c:axId val="1916532"/>
         <c:scaling>
           <c:orientation val="minMax"/>
         </c:scaling>
@@ -197,7 +197,7 @@
             </a:pPr>
           </a:p>
         </c:txPr>
-        <c:crossAx val="7607736"/>
+        <c:crossAx val="8750026"/>
         <c:crosses val="autoZero"/>
         <c:auto val="1"/>
         <c:lblAlgn val="ctr"/>
@@ -205,7 +205,7 @@
         <c:noMultiLvlLbl val="0"/>
       </c:catAx>
       <c:valAx>
-        <c:axId val="7607736"/>
+        <c:axId val="8750026"/>
         <c:scaling>
           <c:orientation val="minMax"/>
         </c:scaling>
@@ -247,7 +247,7 @@
             </a:pPr>
           </a:p>
         </c:txPr>
-        <c:crossAx val="83635416"/>
+        <c:crossAx val="1916532"/>
         <c:crosses val="autoZero"/>
         <c:crossBetween val="between"/>
       </c:valAx>
@@ -617,7 +617,7 @@
             <a:pPr indent="0" algn="r">
               <a:buNone/>
             </a:pPr>
-            <a:fld id="{4ABDEE95-B8FD-451F-9AD1-F31B07802EC3}" type="slidenum">
+            <a:fld id="{2D8ECE24-47FF-4F8B-BC04-926A7EE67FFA}" type="slidenum">
               <a:rPr b="0" lang="en-US" sz="1400" spc="-1" strike="noStrike">
                 <a:solidFill>
                   <a:srgbClr val="000000"/>
@@ -869,7 +869,7 @@
         <p:txBody>
           <a:bodyPr/>
           <a:p>
-            <a:fld id="{BC8AD285-39D2-4178-99B5-EF27A74F8B56}" type="slidenum">
+            <a:fld id="{FE1AB404-D2DF-4F3B-B2DA-3AA34B72A8F6}" type="slidenum">
               <a:t>&lt;#&gt;</a:t>
             </a:fld>
           </a:p>
@@ -952,7 +952,7 @@
         <p:txBody>
           <a:bodyPr/>
           <a:p>
-            <a:fld id="{0E875B2F-30E6-4B8B-A372-06313C3674AB}" type="slidenum">
+            <a:fld id="{A19ADC66-102A-415A-A176-1F289D360A05}" type="slidenum">
               <a:t>&lt;#&gt;</a:t>
             </a:fld>
           </a:p>
@@ -1035,7 +1035,7 @@
         <p:txBody>
           <a:bodyPr/>
           <a:p>
-            <a:fld id="{F3DF052B-F2A6-43E8-B14E-20E9CB6A8816}" type="slidenum">
+            <a:fld id="{DC118E1A-986F-4CF9-BAF1-1A5ED28ED185}" type="slidenum">
               <a:t>&lt;#&gt;</a:t>
             </a:fld>
           </a:p>
@@ -1118,7 +1118,7 @@
         <p:txBody>
           <a:bodyPr/>
           <a:p>
-            <a:fld id="{90C4920E-B7A9-46CC-B5B8-D595FC2B1FAD}" type="slidenum">
+            <a:fld id="{9DCE59FA-490E-49B9-9750-B0423EF1F3B0}" type="slidenum">
               <a:t>&lt;#&gt;</a:t>
             </a:fld>
           </a:p>
@@ -1201,7 +1201,7 @@
         <p:txBody>
           <a:bodyPr/>
           <a:p>
-            <a:fld id="{AAC80ED1-DB8B-4216-A800-473302738735}" type="slidenum">
+            <a:fld id="{472879B1-67D2-43C2-BBF2-C9935905E9E5}" type="slidenum">
               <a:t>&lt;#&gt;</a:t>
             </a:fld>
           </a:p>
@@ -1370,7 +1370,7 @@
         <p:txBody>
           <a:bodyPr/>
           <a:p>
-            <a:fld id="{196F00A0-2FBB-43DA-9DCA-954D4CC7AF53}" type="slidenum">
+            <a:fld id="{2AFEB122-C244-4333-89D4-C576E4C1BEE3}" type="slidenum">
               <a:t>&lt;#&gt;</a:t>
             </a:fld>
           </a:p>
@@ -1453,7 +1453,7 @@
         <p:txBody>
           <a:bodyPr/>
           <a:p>
-            <a:fld id="{C1162753-730C-4800-B2BC-5272980B6FD9}" type="slidenum">
+            <a:fld id="{744B4846-4739-4108-838A-E2116D288EB6}" type="slidenum">
               <a:t>&lt;#&gt;</a:t>
             </a:fld>
           </a:p>
@@ -1668,7 +1668,7 @@
         <p:txBody>
           <a:bodyPr/>
           <a:p>
-            <a:fld id="{3C8D9CC2-660F-47E1-9B69-4A586E9E36A0}" type="slidenum">
+            <a:fld id="{D4B3C151-25D6-4F57-8390-8335DE2ACED5}" type="slidenum">
               <a:t>&lt;#&gt;</a:t>
             </a:fld>
           </a:p>
@@ -1751,7 +1751,7 @@
         <p:txBody>
           <a:bodyPr/>
           <a:p>
-            <a:fld id="{71C88843-4BAC-431F-B07F-C8DE17C240A4}" type="slidenum">
+            <a:fld id="{ADC6DCBA-D9A1-48E5-A645-EBE8DDCB72B6}" type="slidenum">
               <a:t>&lt;#&gt;</a:t>
             </a:fld>
           </a:p>
@@ -1874,7 +1874,7 @@
         <p:txBody>
           <a:bodyPr/>
           <a:p>
-            <a:fld id="{8E040AAC-4572-4D36-98A1-F28C24B1AE76}" type="slidenum">
+            <a:fld id="{87782374-93AE-440A-8350-1A073AF075FE}" type="slidenum">
               <a:t>&lt;#&gt;</a:t>
             </a:fld>
           </a:p>
@@ -1957,7 +1957,7 @@
         <p:txBody>
           <a:bodyPr/>
           <a:p>
-            <a:fld id="{DAEDCB0F-9701-45F3-9E83-C5D04B035500}" type="slidenum">
+            <a:fld id="{8F27BF69-0F7F-473A-9C1D-44E019E5BA05}" type="slidenum">
               <a:t>&lt;#&gt;</a:t>
             </a:fld>
           </a:p>
@@ -2232,7 +2232,7 @@
               </a:lnSpc>
               <a:buNone/>
             </a:pPr>
-            <a:fld id="{9B8F2FDB-6E07-4715-B5D3-F8DBE0C8FE01}" type="slidenum">
+            <a:fld id="{2FEB82F7-8336-43ED-B74F-47130CD84FDF}" type="slidenum">
               <a:rPr b="0" lang="en-US" sz="1200" spc="-1" strike="noStrike">
                 <a:solidFill>
                   <a:schemeClr val="dk1">
@@ -2996,7 +2996,7 @@
               </a:lnSpc>
               <a:buNone/>
             </a:pPr>
-            <a:fld id="{9D18FCEB-57E3-453C-9F99-CBA3204F48A4}" type="slidenum">
+            <a:fld id="{77E81CF2-E6CA-47D4-9077-C11FF7A9A9A8}" type="slidenum">
               <a:rPr b="0" lang="en-US" sz="1200" spc="-1" strike="noStrike">
                 <a:solidFill>
                   <a:schemeClr val="dk1">
@@ -3760,7 +3760,7 @@
               </a:lnSpc>
               <a:buNone/>
             </a:pPr>
-            <a:fld id="{6E970C0B-6563-407C-BD0E-00839AEDCE4B}" type="slidenum">
+            <a:fld id="{89EB170B-E418-4A81-900A-640F134FB4BA}" type="slidenum">
               <a:rPr b="0" lang="en-US" sz="1200" spc="-1" strike="noStrike">
                 <a:solidFill>
                   <a:schemeClr val="dk1">
@@ -4278,7 +4278,7 @@
               </a:lnSpc>
               <a:buNone/>
             </a:pPr>
-            <a:fld id="{82808040-54E5-4B28-85C0-7ED62AE8D539}" type="slidenum">
+            <a:fld id="{56204495-956D-4A92-BC9F-C798A3CE5AD1}" type="slidenum">
               <a:rPr b="0" lang="en-US" sz="1200" spc="-1" strike="noStrike">
                 <a:solidFill>
                   <a:schemeClr val="dk1">
@@ -4796,7 +4796,7 @@
               </a:lnSpc>
               <a:buNone/>
             </a:pPr>
-            <a:fld id="{1EF56F88-C56D-4ED9-A802-52C4B69DF2C8}" type="slidenum">
+            <a:fld id="{84D47F55-2FC8-49C2-B084-A37F01F95A01}" type="slidenum">
               <a:rPr b="0" lang="en-US" sz="1200" spc="-1" strike="noStrike">
                 <a:solidFill>
                   <a:schemeClr val="dk1">
@@ -5314,7 +5314,7 @@
               </a:lnSpc>
               <a:buNone/>
             </a:pPr>
-            <a:fld id="{82959DA8-251C-422C-895F-BF19B77EFF91}" type="slidenum">
+            <a:fld id="{CD666822-E782-41EA-B78F-39E737765EA0}" type="slidenum">
               <a:rPr b="0" lang="en-US" sz="1200" spc="-1" strike="noStrike">
                 <a:solidFill>
                   <a:schemeClr val="dk1">
@@ -5832,7 +5832,7 @@
               </a:lnSpc>
               <a:buNone/>
             </a:pPr>
-            <a:fld id="{F01F5993-C2A0-46C3-90D5-3A29130E86F8}" type="slidenum">
+            <a:fld id="{1CD4EBED-B5A1-44AD-B2F3-3FDC95830B9F}" type="slidenum">
               <a:rPr b="0" lang="en-US" sz="1200" spc="-1" strike="noStrike">
                 <a:solidFill>
                   <a:schemeClr val="dk1">
@@ -5959,7 +5959,7 @@
         </p:spPr>
         <p:txBody>
           <a:bodyPr lIns="90000" rIns="90000" tIns="45000" bIns="45000" anchor="t">
-            <a:normAutofit fontScale="93550"/>
+            <a:normAutofit/>
           </a:bodyPr>
           <a:p>
             <a:pPr marL="432000" indent="-324000">
@@ -6205,7 +6205,7 @@
         </p:spPr>
         <p:txBody>
           <a:bodyPr lIns="90000" rIns="90000" tIns="45000" bIns="45000" anchor="t">
-            <a:normAutofit fontScale="93550"/>
+            <a:normAutofit/>
           </a:bodyPr>
           <a:p>
             <a:pPr marL="432000" indent="-324000">
@@ -6596,7 +6596,7 @@
               </a:lnSpc>
               <a:buNone/>
             </a:pPr>
-            <a:fld id="{3BE1013A-3511-4C04-8F93-28BEAEC1850A}" type="slidenum">
+            <a:fld id="{E1B0D305-7A26-4E5F-90CB-29BC8F3A023A}" type="slidenum">
               <a:rPr b="0" lang="en-US" sz="1200" spc="-1" strike="noStrike">
                 <a:solidFill>
                   <a:schemeClr val="dk1">
@@ -6969,7 +6969,7 @@
         </p:spPr>
         <p:txBody>
           <a:bodyPr lIns="90000" rIns="90000" tIns="45000" bIns="45000" anchor="t">
-            <a:normAutofit fontScale="81053"/>
+            <a:normAutofit fontScale="87480" lnSpcReduction="10000"/>
           </a:bodyPr>
           <a:p>
             <a:pPr marL="432000" indent="-324000">
@@ -7461,7 +7461,7 @@
         </p:spPr>
         <p:txBody>
           <a:bodyPr lIns="90000" rIns="90000" tIns="45000" bIns="45000" anchor="t">
-            <a:normAutofit fontScale="81053"/>
+            <a:normAutofit fontScale="87480" lnSpcReduction="10000"/>
           </a:bodyPr>
           <a:p>
             <a:pPr marL="432000" indent="-324000">
@@ -7852,7 +7852,7 @@
               </a:lnSpc>
               <a:buNone/>
             </a:pPr>
-            <a:fld id="{3AF1BDA5-5146-4F57-977F-BC5DDD0AC467}" type="slidenum">
+            <a:fld id="{69C61AA2-C59A-4AAD-91FB-2C6A3B4B4E3A}" type="slidenum">
               <a:rPr b="0" lang="en-US" sz="1200" spc="-1" strike="noStrike">
                 <a:solidFill>
                   <a:schemeClr val="dk1">
@@ -8124,7 +8124,7 @@
               </a:lnSpc>
               <a:buNone/>
             </a:pPr>
-            <a:fld id="{FB483449-14AB-41FB-99D5-3C283242BC88}" type="slidenum">
+            <a:fld id="{C4AAE77B-CE44-41C0-8E86-2F513F3652AA}" type="slidenum">
               <a:rPr b="0" lang="en-US" sz="1200" spc="-1" strike="noStrike">
                 <a:solidFill>
                   <a:schemeClr val="dk1">
@@ -8347,7 +8347,7 @@
               </a:lnSpc>
               <a:buNone/>
             </a:pPr>
-            <a:fld id="{686D1E0B-04F4-442F-A643-78439877F0BF}" type="slidenum">
+            <a:fld id="{20BC1EF5-824F-486F-BA61-C100328789F3}" type="slidenum">
               <a:rPr b="0" lang="en-US" sz="1200" spc="-1" strike="noStrike">
                 <a:solidFill>
                   <a:schemeClr val="dk1">
